--- a/추진일정_절차도.pptx
+++ b/추진일정_절차도.pptx
@@ -1039,7 +1039,7 @@
             </a:avLst>
           </a:prstGeom>
           <a:solidFill>
-            <a:srgbClr val="1F3A6E"/>
+            <a:srgbClr val="FFFFFF"/>
           </a:solidFill>
           <a:ln w="15875">
             <a:solidFill>
@@ -1076,7 +1076,7 @@
             <a:r>
               <a:rPr lang="en-US" sz="1050" b="1" dirty="0">
                 <a:solidFill>
-                  <a:srgbClr val="FFFFFF"/>
+                  <a:srgbClr val="262626"/>
                 </a:solidFill>
                 <a:latin typeface="신세계 민부리 Bold(TTF)" pitchFamily="34" charset="0"/>
                 <a:ea typeface="신세계 민부리 Bold(TTF)" pitchFamily="34" charset="-122"/>
@@ -1093,7 +1093,7 @@
             <a:r>
               <a:rPr lang="en-US" sz="900" dirty="0">
                 <a:solidFill>
-                  <a:srgbClr val="DCE3EF"/>
+                  <a:srgbClr val="595959"/>
                 </a:solidFill>
                 <a:latin typeface="신세계 민부리 Light(TTF)" pitchFamily="34" charset="0"/>
                 <a:ea typeface="신세계 민부리 Light(TTF)" pitchFamily="34" charset="-122"/>

--- a/추진일정_절차도.pptx
+++ b/추진일정_절차도.pptx
@@ -916,24 +916,46 @@
       </p:sp>
       <p:sp>
         <p:nvSpPr>
-          <p:cNvPr id="3" name="Step1Box"/>
+          <p:cNvPr id="3" name="TimelineLine"/>
           <p:cNvSpPr/>
           <p:nvPr/>
         </p:nvSpPr>
         <p:spPr>
           <a:xfrm>
-            <a:off x="274320" y="685800"/>
-            <a:ext cx="1057046" cy="566928"/>
-          </a:xfrm>
-          <a:prstGeom prst="roundRect">
-            <a:avLst>
-              <a:gd name="adj" fmla="val 12903"/>
-            </a:avLst>
+            <a:off x="274320" y="914400"/>
+            <a:ext cx="6309360" cy="0"/>
+          </a:xfrm>
+          <a:prstGeom prst="line">
+            <a:avLst/>
+          </a:prstGeom>
+          <a:noFill/>
+          <a:ln w="25400">
+            <a:solidFill>
+              <a:srgbClr val="1F3A6E"/>
+            </a:solidFill>
+            <a:prstDash val="solid"/>
+            <a:tailEnd type="triangle"/>
+          </a:ln>
+        </p:spPr>
+      </p:sp>
+      <p:sp>
+        <p:nvSpPr>
+          <p:cNvPr id="4" name="Dot1"/>
+          <p:cNvSpPr/>
+          <p:nvPr/>
+        </p:nvSpPr>
+        <p:spPr>
+          <a:xfrm>
+            <a:off x="800100" y="845820"/>
+            <a:ext cx="137160" cy="137160"/>
+          </a:xfrm>
+          <a:prstGeom prst="ellipse">
+            <a:avLst/>
           </a:prstGeom>
           <a:solidFill>
             <a:srgbClr val="FFFFFF"/>
           </a:solidFill>
-          <a:ln w="15875">
+          <a:ln w="25400">
             <a:solidFill>
               <a:srgbClr val="1F3A6E"/>
             </a:solidFill>
@@ -943,14 +965,14 @@
       </p:sp>
       <p:sp>
         <p:nvSpPr>
-          <p:cNvPr id="4" name="Step1Text"/>
+          <p:cNvPr id="5" name="Date1"/>
           <p:cNvSpPr txBox="1"/>
           <p:nvPr/>
         </p:nvSpPr>
         <p:spPr>
           <a:xfrm>
-            <a:off x="274320" y="685800"/>
-            <a:ext cx="1057046" cy="566928"/>
+            <a:off x="274320" y="603504"/>
+            <a:ext cx="1188720" cy="201168"/>
           </a:xfrm>
           <a:prstGeom prst="rect">
             <a:avLst/>
@@ -966,82 +988,38 @@
               <a:buNone/>
             </a:pPr>
             <a:r>
-              <a:rPr lang="en-US" sz="1050" b="1" dirty="0">
-                <a:solidFill>
-                  <a:srgbClr val="262626"/>
+              <a:rPr lang="en-US" sz="900" dirty="0">
+                <a:solidFill>
+                  <a:srgbClr val="1F3A6E"/>
                 </a:solidFill>
                 <a:latin typeface="신세계 민부리 Bold(TTF)" pitchFamily="34" charset="0"/>
                 <a:ea typeface="신세계 민부리 Bold(TTF)" pitchFamily="34" charset="-122"/>
                 <a:cs typeface="신세계 민부리 Bold(TTF)" pitchFamily="34" charset="-120"/>
               </a:rPr>
-              <a:t>① 공모 설계</a:t>
-            </a:r>
-            <a:endParaRPr lang="en-US" sz="1050" dirty="0"/>
-          </a:p>
-          <a:p>
-            <a:pPr algn="ctr" indent="0" marL="0">
-              <a:buNone/>
-            </a:pPr>
-            <a:r>
-              <a:rPr lang="en-US" sz="900" dirty="0">
-                <a:solidFill>
-                  <a:srgbClr val="595959"/>
-                </a:solidFill>
-                <a:latin typeface="신세계 민부리 Light(TTF)" pitchFamily="34" charset="0"/>
-                <a:ea typeface="신세계 민부리 Light(TTF)" pitchFamily="34" charset="-122"/>
-                <a:cs typeface="신세계 민부리 Light(TTF)" pitchFamily="34" charset="-120"/>
-              </a:rPr>
               <a:t>’26.4Q</a:t>
             </a:r>
-            <a:endParaRPr lang="en-US" sz="1050" dirty="0"/>
+            <a:endParaRPr lang="en-US" sz="900" dirty="0"/>
           </a:p>
         </p:txBody>
       </p:sp>
       <p:sp>
         <p:nvSpPr>
-          <p:cNvPr id="5" name="Arrow1"/>
+          <p:cNvPr id="6" name="Box1"/>
           <p:cNvSpPr/>
           <p:nvPr/>
         </p:nvSpPr>
         <p:spPr>
           <a:xfrm>
-            <a:off x="1386230" y="886968"/>
-            <a:ext cx="146304" cy="164592"/>
-          </a:xfrm>
-          <a:prstGeom prst="rightArrow">
-            <a:avLst/>
-          </a:prstGeom>
-          <a:solidFill>
-            <a:srgbClr val="A6A6A6"/>
+            <a:off x="274320" y="1115568"/>
+            <a:ext cx="1188720" cy="1737360"/>
+          </a:xfrm>
+          <a:prstGeom prst="rect">
+            <a:avLst/>
+          </a:prstGeom>
+          <a:solidFill>
+            <a:srgbClr val="FFFFFF"/>
           </a:solidFill>
           <a:ln w="12700">
-            <a:solidFill>
-              <a:srgbClr val="A6A6A6"/>
-            </a:solidFill>
-            <a:prstDash val="solid"/>
-          </a:ln>
-        </p:spPr>
-      </p:sp>
-      <p:sp>
-        <p:nvSpPr>
-          <p:cNvPr id="6" name="Step2Box"/>
-          <p:cNvSpPr/>
-          <p:nvPr/>
-        </p:nvSpPr>
-        <p:spPr>
-          <a:xfrm>
-            <a:off x="1587398" y="685800"/>
-            <a:ext cx="1057046" cy="566928"/>
-          </a:xfrm>
-          <a:prstGeom prst="roundRect">
-            <a:avLst>
-              <a:gd name="adj" fmla="val 12903"/>
-            </a:avLst>
-          </a:prstGeom>
-          <a:solidFill>
-            <a:srgbClr val="FFFFFF"/>
-          </a:solidFill>
-          <a:ln w="15875">
             <a:solidFill>
               <a:srgbClr val="1F3A6E"/>
             </a:solidFill>
@@ -1051,105 +1029,22 @@
       </p:sp>
       <p:sp>
         <p:nvSpPr>
-          <p:cNvPr id="7" name="Step2Text"/>
-          <p:cNvSpPr txBox="1"/>
-          <p:nvPr/>
-        </p:nvSpPr>
-        <p:spPr>
-          <a:xfrm>
-            <a:off x="1587398" y="685800"/>
-            <a:ext cx="1057046" cy="566928"/>
-          </a:xfrm>
-          <a:prstGeom prst="rect">
-            <a:avLst/>
-          </a:prstGeom>
-          <a:noFill/>
-          <a:ln/>
-        </p:spPr>
-        <p:txBody>
-          <a:bodyPr wrap="square" lIns="0" tIns="0" rIns="0" bIns="0" rtlCol="0" anchor="ctr"/>
-          <a:lstStyle/>
-          <a:p>
-            <a:pPr algn="ctr" indent="0" marL="0">
-              <a:buNone/>
-            </a:pPr>
-            <a:r>
-              <a:rPr lang="en-US" sz="1050" b="1" dirty="0">
-                <a:solidFill>
-                  <a:srgbClr val="262626"/>
-                </a:solidFill>
-                <a:latin typeface="신세계 민부리 Bold(TTF)" pitchFamily="34" charset="0"/>
-                <a:ea typeface="신세계 민부리 Bold(TTF)" pitchFamily="34" charset="-122"/>
-                <a:cs typeface="신세계 민부리 Bold(TTF)" pitchFamily="34" charset="-120"/>
-              </a:rPr>
-              <a:t>② 민간 제안</a:t>
-            </a:r>
-            <a:endParaRPr lang="en-US" sz="1050" dirty="0"/>
-          </a:p>
-          <a:p>
-            <a:pPr algn="ctr" indent="0" marL="0">
-              <a:buNone/>
-            </a:pPr>
-            <a:r>
-              <a:rPr lang="en-US" sz="900" dirty="0">
-                <a:solidFill>
-                  <a:srgbClr val="595959"/>
-                </a:solidFill>
-                <a:latin typeface="신세계 민부리 Light(TTF)" pitchFamily="34" charset="0"/>
-                <a:ea typeface="신세계 민부리 Light(TTF)" pitchFamily="34" charset="-122"/>
-                <a:cs typeface="신세계 민부리 Light(TTF)" pitchFamily="34" charset="-120"/>
-              </a:rPr>
-              <a:t>’27.1Q</a:t>
-            </a:r>
-            <a:endParaRPr lang="en-US" sz="1050" dirty="0"/>
-          </a:p>
-        </p:txBody>
-      </p:sp>
-      <p:sp>
-        <p:nvSpPr>
-          <p:cNvPr id="8" name="Arrow2"/>
+          <p:cNvPr id="7" name="BoxHead1"/>
           <p:cNvSpPr/>
           <p:nvPr/>
         </p:nvSpPr>
         <p:spPr>
           <a:xfrm>
-            <a:off x="2699309" y="886968"/>
-            <a:ext cx="146304" cy="164592"/>
-          </a:xfrm>
-          <a:prstGeom prst="rightArrow">
-            <a:avLst/>
-          </a:prstGeom>
-          <a:solidFill>
-            <a:srgbClr val="A6A6A6"/>
+            <a:off x="274320" y="1115568"/>
+            <a:ext cx="1188720" cy="274320"/>
+          </a:xfrm>
+          <a:prstGeom prst="rect">
+            <a:avLst/>
+          </a:prstGeom>
+          <a:solidFill>
+            <a:srgbClr val="1F3A6E"/>
           </a:solidFill>
           <a:ln w="12700">
-            <a:solidFill>
-              <a:srgbClr val="A6A6A6"/>
-            </a:solidFill>
-            <a:prstDash val="solid"/>
-          </a:ln>
-        </p:spPr>
-      </p:sp>
-      <p:sp>
-        <p:nvSpPr>
-          <p:cNvPr id="9" name="Step3Box"/>
-          <p:cNvSpPr/>
-          <p:nvPr/>
-        </p:nvSpPr>
-        <p:spPr>
-          <a:xfrm>
-            <a:off x="2900477" y="685800"/>
-            <a:ext cx="1057046" cy="566928"/>
-          </a:xfrm>
-          <a:prstGeom prst="roundRect">
-            <a:avLst>
-              <a:gd name="adj" fmla="val 12903"/>
-            </a:avLst>
-          </a:prstGeom>
-          <a:solidFill>
-            <a:srgbClr val="FFFFFF"/>
-          </a:solidFill>
-          <a:ln w="15875">
             <a:solidFill>
               <a:srgbClr val="1F3A6E"/>
             </a:solidFill>
@@ -1159,14 +1054,14 @@
       </p:sp>
       <p:sp>
         <p:nvSpPr>
-          <p:cNvPr id="10" name="Step3Text"/>
+          <p:cNvPr id="8" name="BoxTitle1"/>
           <p:cNvSpPr txBox="1"/>
           <p:nvPr/>
         </p:nvSpPr>
         <p:spPr>
           <a:xfrm>
-            <a:off x="2900477" y="685800"/>
-            <a:ext cx="1057046" cy="566928"/>
+            <a:off x="274320" y="1115568"/>
+            <a:ext cx="1188720" cy="274320"/>
           </a:xfrm>
           <a:prstGeom prst="rect">
             <a:avLst/>
@@ -1182,82 +1077,157 @@
               <a:buNone/>
             </a:pPr>
             <a:r>
-              <a:rPr lang="en-US" sz="1050" b="1" dirty="0">
-                <a:solidFill>
-                  <a:srgbClr val="262626"/>
+              <a:rPr lang="en-US" sz="1000" dirty="0">
+                <a:solidFill>
+                  <a:srgbClr val="FFFFFF"/>
                 </a:solidFill>
                 <a:latin typeface="신세계 민부리 Bold(TTF)" pitchFamily="34" charset="0"/>
                 <a:ea typeface="신세계 민부리 Bold(TTF)" pitchFamily="34" charset="-122"/>
                 <a:cs typeface="신세계 민부리 Bold(TTF)" pitchFamily="34" charset="-120"/>
               </a:rPr>
-              <a:t>③ 검토 / 심의</a:t>
-            </a:r>
-            <a:endParaRPr lang="en-US" sz="1050" dirty="0"/>
-          </a:p>
-          <a:p>
-            <a:pPr algn="ctr" indent="0" marL="0">
-              <a:buNone/>
-            </a:pPr>
-            <a:r>
-              <a:rPr lang="en-US" sz="900" dirty="0">
-                <a:solidFill>
-                  <a:srgbClr val="595959"/>
+              <a:t>① 공모 설계</a:t>
+            </a:r>
+            <a:endParaRPr lang="en-US" sz="1000" dirty="0"/>
+          </a:p>
+        </p:txBody>
+      </p:sp>
+      <p:sp>
+        <p:nvSpPr>
+          <p:cNvPr id="9" name="BoxBody1"/>
+          <p:cNvSpPr txBox="1"/>
+          <p:nvPr/>
+        </p:nvSpPr>
+        <p:spPr>
+          <a:xfrm>
+            <a:off x="320040" y="1444752"/>
+            <a:ext cx="1097280" cy="1353312"/>
+          </a:xfrm>
+          <a:prstGeom prst="rect">
+            <a:avLst/>
+          </a:prstGeom>
+          <a:noFill/>
+          <a:ln/>
+        </p:spPr>
+        <p:txBody>
+          <a:bodyPr wrap="square" lIns="0" tIns="0" rIns="0" bIns="0" rtlCol="0" anchor="t"/>
+          <a:lstStyle/>
+          <a:p>
+            <a:pPr indent="0" marL="0">
+              <a:spcAft>
+                <a:spcPts val="200"/>
+              </a:spcAft>
+              <a:buNone/>
+            </a:pPr>
+            <a:r>
+              <a:rPr lang="en-US" sz="850" b="1" dirty="0">
+                <a:solidFill>
+                  <a:srgbClr val="262626"/>
+                </a:solidFill>
+                <a:latin typeface="신세계 민부리 Bold(TTF)" pitchFamily="34" charset="0"/>
+                <a:ea typeface="신세계 민부리 Bold(TTF)" pitchFamily="34" charset="-122"/>
+                <a:cs typeface="신세계 민부리 Bold(TTF)" pitchFamily="34" charset="-120"/>
+              </a:rPr>
+              <a:t>· 효성 해지시지급금 합의</a:t>
+            </a:r>
+            <a:endParaRPr lang="en-US" sz="850" dirty="0"/>
+          </a:p>
+          <a:p>
+            <a:pPr indent="0" marL="0">
+              <a:spcAft>
+                <a:spcPts val="200"/>
+              </a:spcAft>
+              <a:buNone/>
+            </a:pPr>
+            <a:r>
+              <a:rPr lang="en-US" sz="850" b="1" dirty="0">
+                <a:solidFill>
+                  <a:srgbClr val="262626"/>
+                </a:solidFill>
+                <a:latin typeface="신세계 민부리 Bold(TTF)" pitchFamily="34" charset="0"/>
+                <a:ea typeface="신세계 민부리 Bold(TTF)" pitchFamily="34" charset="-122"/>
+                <a:cs typeface="신세계 민부리 Bold(TTF)" pitchFamily="34" charset="-120"/>
+              </a:rPr>
+              <a:t>· 市 공모 기준 협의</a:t>
+            </a:r>
+            <a:endParaRPr lang="en-US" sz="850" dirty="0"/>
+          </a:p>
+          <a:p>
+            <a:pPr indent="0" marL="0">
+              <a:spcAft>
+                <a:spcPts val="200"/>
+              </a:spcAft>
+              <a:buNone/>
+            </a:pPr>
+            <a:r>
+              <a:rPr lang="en-US" sz="400" dirty="0">
+                <a:solidFill>
+                  <a:srgbClr val="000000"/>
+                </a:solidFill>
+              </a:rPr>
+              <a:t> </a:t>
+            </a:r>
+            <a:endParaRPr lang="en-US" sz="850" dirty="0"/>
+          </a:p>
+          <a:p>
+            <a:pPr indent="0" marL="0">
+              <a:spcAft>
+                <a:spcPts val="200"/>
+              </a:spcAft>
+              <a:buNone/>
+            </a:pPr>
+            <a:r>
+              <a:rPr lang="en-US" sz="850" dirty="0">
+                <a:solidFill>
+                  <a:srgbClr val="262626"/>
                 </a:solidFill>
                 <a:latin typeface="신세계 민부리 Light(TTF)" pitchFamily="34" charset="0"/>
                 <a:ea typeface="신세계 민부리 Light(TTF)" pitchFamily="34" charset="-122"/>
                 <a:cs typeface="신세계 민부리 Light(TTF)" pitchFamily="34" charset="-120"/>
               </a:rPr>
-              <a:t>’27.2Q ~ 4Q</a:t>
-            </a:r>
-            <a:endParaRPr lang="en-US" sz="1050" dirty="0"/>
+              <a:t>→ 광고사업 불가 근거로 300억 제시</a:t>
+            </a:r>
+            <a:endParaRPr lang="en-US" sz="850" dirty="0"/>
+          </a:p>
+          <a:p>
+            <a:pPr indent="0" marL="0">
+              <a:spcAft>
+                <a:spcPts val="200"/>
+              </a:spcAft>
+              <a:buNone/>
+            </a:pPr>
+            <a:r>
+              <a:rPr lang="en-US" sz="850" dirty="0">
+                <a:solidFill>
+                  <a:srgbClr val="262626"/>
+                </a:solidFill>
+                <a:latin typeface="신세계 민부리 Light(TTF)" pitchFamily="34" charset="0"/>
+                <a:ea typeface="신세계 민부리 Light(TTF)" pitchFamily="34" charset="-122"/>
+                <a:cs typeface="신세계 민부리 Light(TTF)" pitchFamily="34" charset="-120"/>
+              </a:rPr>
+              <a:t>→ 민투법 적용 기준 협의 (투자비, 공공성 등)</a:t>
+            </a:r>
+            <a:endParaRPr lang="en-US" sz="850" dirty="0"/>
           </a:p>
         </p:txBody>
       </p:sp>
       <p:sp>
         <p:nvSpPr>
-          <p:cNvPr id="11" name="Arrow3"/>
+          <p:cNvPr id="10" name="Dot2"/>
           <p:cNvSpPr/>
           <p:nvPr/>
         </p:nvSpPr>
         <p:spPr>
           <a:xfrm>
-            <a:off x="4012387" y="886968"/>
-            <a:ext cx="146304" cy="164592"/>
-          </a:xfrm>
-          <a:prstGeom prst="rightArrow">
-            <a:avLst/>
-          </a:prstGeom>
-          <a:solidFill>
-            <a:srgbClr val="A6A6A6"/>
-          </a:solidFill>
-          <a:ln w="12700">
-            <a:solidFill>
-              <a:srgbClr val="A6A6A6"/>
-            </a:solidFill>
-            <a:prstDash val="solid"/>
-          </a:ln>
-        </p:spPr>
-      </p:sp>
-      <p:sp>
-        <p:nvSpPr>
-          <p:cNvPr id="12" name="Step4Box"/>
-          <p:cNvSpPr/>
-          <p:nvPr/>
-        </p:nvSpPr>
-        <p:spPr>
-          <a:xfrm>
-            <a:off x="4213555" y="685800"/>
-            <a:ext cx="1057046" cy="566928"/>
-          </a:xfrm>
-          <a:prstGeom prst="roundRect">
-            <a:avLst>
-              <a:gd name="adj" fmla="val 12903"/>
-            </a:avLst>
+            <a:off x="2080260" y="845820"/>
+            <a:ext cx="137160" cy="137160"/>
+          </a:xfrm>
+          <a:prstGeom prst="ellipse">
+            <a:avLst/>
           </a:prstGeom>
           <a:solidFill>
             <a:srgbClr val="FFFFFF"/>
           </a:solidFill>
-          <a:ln w="15875">
+          <a:ln w="25400">
             <a:solidFill>
               <a:srgbClr val="1F3A6E"/>
             </a:solidFill>
@@ -1267,14 +1237,14 @@
       </p:sp>
       <p:sp>
         <p:nvSpPr>
-          <p:cNvPr id="13" name="Step4Text"/>
+          <p:cNvPr id="11" name="Date2"/>
           <p:cNvSpPr txBox="1"/>
           <p:nvPr/>
         </p:nvSpPr>
         <p:spPr>
           <a:xfrm>
-            <a:off x="4213555" y="685800"/>
-            <a:ext cx="1057046" cy="566928"/>
+            <a:off x="1554480" y="603504"/>
+            <a:ext cx="1188720" cy="201168"/>
           </a:xfrm>
           <a:prstGeom prst="rect">
             <a:avLst/>
@@ -1290,82 +1260,38 @@
               <a:buNone/>
             </a:pPr>
             <a:r>
-              <a:rPr lang="en-US" sz="1050" b="1" dirty="0">
-                <a:solidFill>
-                  <a:srgbClr val="262626"/>
+              <a:rPr lang="en-US" sz="900" dirty="0">
+                <a:solidFill>
+                  <a:srgbClr val="1F3A6E"/>
                 </a:solidFill>
                 <a:latin typeface="신세계 민부리 Bold(TTF)" pitchFamily="34" charset="0"/>
                 <a:ea typeface="신세계 민부리 Bold(TTF)" pitchFamily="34" charset="-122"/>
                 <a:cs typeface="신세계 민부리 Bold(TTF)" pitchFamily="34" charset="-120"/>
               </a:rPr>
-              <a:t>④ 공고 / 협약</a:t>
-            </a:r>
-            <a:endParaRPr lang="en-US" sz="1050" dirty="0"/>
-          </a:p>
-          <a:p>
-            <a:pPr algn="ctr" indent="0" marL="0">
-              <a:buNone/>
-            </a:pPr>
-            <a:r>
-              <a:rPr lang="en-US" sz="900" dirty="0">
-                <a:solidFill>
-                  <a:srgbClr val="595959"/>
-                </a:solidFill>
-                <a:latin typeface="신세계 민부리 Light(TTF)" pitchFamily="34" charset="0"/>
-                <a:ea typeface="신세계 민부리 Light(TTF)" pitchFamily="34" charset="-122"/>
-                <a:cs typeface="신세계 민부리 Light(TTF)" pitchFamily="34" charset="-120"/>
-              </a:rPr>
-              <a:t>’28.1Q ~ 3Q</a:t>
-            </a:r>
-            <a:endParaRPr lang="en-US" sz="1050" dirty="0"/>
+              <a:t>’27.1Q</a:t>
+            </a:r>
+            <a:endParaRPr lang="en-US" sz="900" dirty="0"/>
           </a:p>
         </p:txBody>
       </p:sp>
       <p:sp>
         <p:nvSpPr>
-          <p:cNvPr id="14" name="Arrow4"/>
+          <p:cNvPr id="12" name="Box2"/>
           <p:cNvSpPr/>
           <p:nvPr/>
         </p:nvSpPr>
         <p:spPr>
           <a:xfrm>
-            <a:off x="5325466" y="886968"/>
-            <a:ext cx="146304" cy="164592"/>
-          </a:xfrm>
-          <a:prstGeom prst="rightArrow">
-            <a:avLst/>
-          </a:prstGeom>
-          <a:solidFill>
-            <a:srgbClr val="A6A6A6"/>
+            <a:off x="1554480" y="1115568"/>
+            <a:ext cx="1188720" cy="1737360"/>
+          </a:xfrm>
+          <a:prstGeom prst="rect">
+            <a:avLst/>
+          </a:prstGeom>
+          <a:solidFill>
+            <a:srgbClr val="FFFFFF"/>
           </a:solidFill>
           <a:ln w="12700">
-            <a:solidFill>
-              <a:srgbClr val="A6A6A6"/>
-            </a:solidFill>
-            <a:prstDash val="solid"/>
-          </a:ln>
-        </p:spPr>
-      </p:sp>
-      <p:sp>
-        <p:nvSpPr>
-          <p:cNvPr id="15" name="Step5Box"/>
-          <p:cNvSpPr/>
-          <p:nvPr/>
-        </p:nvSpPr>
-        <p:spPr>
-          <a:xfrm>
-            <a:off x="5526634" y="685800"/>
-            <a:ext cx="1057046" cy="566928"/>
-          </a:xfrm>
-          <a:prstGeom prst="roundRect">
-            <a:avLst>
-              <a:gd name="adj" fmla="val 12903"/>
-            </a:avLst>
-          </a:prstGeom>
-          <a:solidFill>
-            <a:srgbClr val="FFFFFF"/>
-          </a:solidFill>
-          <a:ln w="15875">
             <a:solidFill>
               <a:srgbClr val="1F3A6E"/>
             </a:solidFill>
@@ -1375,14 +1301,39 @@
       </p:sp>
       <p:sp>
         <p:nvSpPr>
-          <p:cNvPr id="16" name="Step5Text"/>
+          <p:cNvPr id="13" name="BoxHead2"/>
+          <p:cNvSpPr/>
+          <p:nvPr/>
+        </p:nvSpPr>
+        <p:spPr>
+          <a:xfrm>
+            <a:off x="1554480" y="1115568"/>
+            <a:ext cx="1188720" cy="274320"/>
+          </a:xfrm>
+          <a:prstGeom prst="rect">
+            <a:avLst/>
+          </a:prstGeom>
+          <a:solidFill>
+            <a:srgbClr val="1F3A6E"/>
+          </a:solidFill>
+          <a:ln w="12700">
+            <a:solidFill>
+              <a:srgbClr val="1F3A6E"/>
+            </a:solidFill>
+            <a:prstDash val="solid"/>
+          </a:ln>
+        </p:spPr>
+      </p:sp>
+      <p:sp>
+        <p:nvSpPr>
+          <p:cNvPr id="14" name="BoxTitle2"/>
           <p:cNvSpPr txBox="1"/>
           <p:nvPr/>
         </p:nvSpPr>
         <p:spPr>
           <a:xfrm>
-            <a:off x="5526634" y="685800"/>
-            <a:ext cx="1057046" cy="566928"/>
+            <a:off x="1554480" y="1115568"/>
+            <a:ext cx="1188720" cy="274320"/>
           </a:xfrm>
           <a:prstGeom prst="rect">
             <a:avLst/>
@@ -1398,47 +1349,30 @@
               <a:buNone/>
             </a:pPr>
             <a:r>
-              <a:rPr lang="en-US" sz="1050" b="1" dirty="0">
-                <a:solidFill>
-                  <a:srgbClr val="262626"/>
+              <a:rPr lang="en-US" sz="1000" dirty="0">
+                <a:solidFill>
+                  <a:srgbClr val="FFFFFF"/>
                 </a:solidFill>
                 <a:latin typeface="신세계 민부리 Bold(TTF)" pitchFamily="34" charset="0"/>
                 <a:ea typeface="신세계 민부리 Bold(TTF)" pitchFamily="34" charset="-122"/>
                 <a:cs typeface="신세계 민부리 Bold(TTF)" pitchFamily="34" charset="-120"/>
               </a:rPr>
-              <a:t>⑤ 착공 / 개장</a:t>
-            </a:r>
-            <a:endParaRPr lang="en-US" sz="1050" dirty="0"/>
-          </a:p>
-          <a:p>
-            <a:pPr algn="ctr" indent="0" marL="0">
-              <a:buNone/>
-            </a:pPr>
-            <a:r>
-              <a:rPr lang="en-US" sz="900" dirty="0">
-                <a:solidFill>
-                  <a:srgbClr val="595959"/>
-                </a:solidFill>
-                <a:latin typeface="신세계 민부리 Light(TTF)" pitchFamily="34" charset="0"/>
-                <a:ea typeface="신세계 민부리 Light(TTF)" pitchFamily="34" charset="-122"/>
-                <a:cs typeface="신세계 민부리 Light(TTF)" pitchFamily="34" charset="-120"/>
-              </a:rPr>
-              <a:t>’28.下 ~ ’29.初</a:t>
-            </a:r>
-            <a:endParaRPr lang="en-US" sz="1050" dirty="0"/>
+              <a:t>② 민간 제안</a:t>
+            </a:r>
+            <a:endParaRPr lang="en-US" sz="1000" dirty="0"/>
           </a:p>
         </p:txBody>
       </p:sp>
       <p:sp>
         <p:nvSpPr>
-          <p:cNvPr id="17" name="Item1"/>
+          <p:cNvPr id="15" name="BoxBody2"/>
           <p:cNvSpPr txBox="1"/>
           <p:nvPr/>
         </p:nvSpPr>
         <p:spPr>
           <a:xfrm>
-            <a:off x="274320" y="1508760"/>
-            <a:ext cx="6309360" cy="420624"/>
+            <a:off x="1600200" y="1444752"/>
+            <a:ext cx="1097280" cy="1353312"/>
           </a:xfrm>
           <a:prstGeom prst="rect">
             <a:avLst/>
@@ -1457,16 +1391,19 @@
               <a:buNone/>
             </a:pPr>
             <a:r>
-              <a:rPr lang="en-US" sz="950" b="1" dirty="0">
-                <a:solidFill>
-                  <a:srgbClr val="1F3A6E"/>
+              <a:rPr lang="en-US" sz="850" b="1" dirty="0">
+                <a:solidFill>
+                  <a:srgbClr val="262626"/>
                 </a:solidFill>
                 <a:latin typeface="신세계 민부리 Bold(TTF)" pitchFamily="34" charset="0"/>
                 <a:ea typeface="신세계 민부리 Bold(TTF)" pitchFamily="34" charset="-122"/>
                 <a:cs typeface="신세계 민부리 Bold(TTF)" pitchFamily="34" charset="-120"/>
               </a:rPr>
-              <a:t>① 공모 설계 </a:t>
-            </a:r>
+              <a:t>· 통합사업 제안서 제출</a:t>
+            </a:r>
+            <a:endParaRPr lang="en-US" sz="850" dirty="0"/>
+          </a:p>
+          <a:p>
             <a:pPr indent="0" marL="0">
               <a:spcAft>
                 <a:spcPts val="200"/>
@@ -1474,16 +1411,16 @@
               <a:buNone/>
             </a:pPr>
             <a:r>
-              <a:rPr lang="en-US" sz="950" dirty="0">
-                <a:solidFill>
-                  <a:srgbClr val="595959"/>
-                </a:solidFill>
-                <a:latin typeface="신세계 민부리 Light(TTF)" pitchFamily="34" charset="0"/>
-                <a:ea typeface="신세계 민부리 Light(TTF)" pitchFamily="34" charset="-122"/>
-                <a:cs typeface="신세계 민부리 Light(TTF)" pitchFamily="34" charset="-120"/>
-              </a:rPr>
-              <a:t>(’26.4Q)  </a:t>
-            </a:r>
+              <a:rPr lang="en-US" sz="400" dirty="0">
+                <a:solidFill>
+                  <a:srgbClr val="000000"/>
+                </a:solidFill>
+              </a:rPr>
+              <a:t> </a:t>
+            </a:r>
+            <a:endParaRPr lang="en-US" sz="850" dirty="0"/>
+          </a:p>
+          <a:p>
             <a:pPr indent="0" marL="0">
               <a:spcAft>
                 <a:spcPts val="200"/>
@@ -1491,18 +1428,193 @@
               <a:buNone/>
             </a:pPr>
             <a:r>
-              <a:rPr lang="en-US" sz="950" b="1" dirty="0">
+              <a:rPr lang="en-US" sz="850" dirty="0">
                 <a:solidFill>
                   <a:srgbClr val="262626"/>
+                </a:solidFill>
+                <a:latin typeface="신세계 민부리 Light(TTF)" pitchFamily="34" charset="0"/>
+                <a:ea typeface="신세계 민부리 Light(TTF)" pitchFamily="34" charset="-122"/>
+                <a:cs typeface="신세계 민부리 Light(TTF)" pitchFamily="34" charset="-120"/>
+              </a:rPr>
+              <a:t>→ 기본설계, 공공성 방안, 통합운영 방안 등</a:t>
+            </a:r>
+            <a:endParaRPr lang="en-US" sz="850" dirty="0"/>
+          </a:p>
+        </p:txBody>
+      </p:sp>
+      <p:sp>
+        <p:nvSpPr>
+          <p:cNvPr id="16" name="Dot3"/>
+          <p:cNvSpPr/>
+          <p:nvPr/>
+        </p:nvSpPr>
+        <p:spPr>
+          <a:xfrm>
+            <a:off x="3360420" y="845820"/>
+            <a:ext cx="137160" cy="137160"/>
+          </a:xfrm>
+          <a:prstGeom prst="ellipse">
+            <a:avLst/>
+          </a:prstGeom>
+          <a:solidFill>
+            <a:srgbClr val="FFFFFF"/>
+          </a:solidFill>
+          <a:ln w="25400">
+            <a:solidFill>
+              <a:srgbClr val="1F3A6E"/>
+            </a:solidFill>
+            <a:prstDash val="solid"/>
+          </a:ln>
+        </p:spPr>
+      </p:sp>
+      <p:sp>
+        <p:nvSpPr>
+          <p:cNvPr id="17" name="Date3"/>
+          <p:cNvSpPr txBox="1"/>
+          <p:nvPr/>
+        </p:nvSpPr>
+        <p:spPr>
+          <a:xfrm>
+            <a:off x="2834640" y="603504"/>
+            <a:ext cx="1188720" cy="201168"/>
+          </a:xfrm>
+          <a:prstGeom prst="rect">
+            <a:avLst/>
+          </a:prstGeom>
+          <a:noFill/>
+          <a:ln/>
+        </p:spPr>
+        <p:txBody>
+          <a:bodyPr wrap="square" lIns="0" tIns="0" rIns="0" bIns="0" rtlCol="0" anchor="ctr"/>
+          <a:lstStyle/>
+          <a:p>
+            <a:pPr algn="ctr" indent="0" marL="0">
+              <a:buNone/>
+            </a:pPr>
+            <a:r>
+              <a:rPr lang="en-US" sz="900" dirty="0">
+                <a:solidFill>
+                  <a:srgbClr val="1F3A6E"/>
                 </a:solidFill>
                 <a:latin typeface="신세계 민부리 Bold(TTF)" pitchFamily="34" charset="0"/>
                 <a:ea typeface="신세계 민부리 Bold(TTF)" pitchFamily="34" charset="-122"/>
                 <a:cs typeface="신세계 민부리 Bold(TTF)" pitchFamily="34" charset="-120"/>
               </a:rPr>
-              <a:t>효성 해지시지급금 합의 · 市 공모 기준 협의</a:t>
-            </a:r>
-            <a:endParaRPr lang="en-US" sz="950" dirty="0"/>
-          </a:p>
+              <a:t>’27.2Q ~ 4Q</a:t>
+            </a:r>
+            <a:endParaRPr lang="en-US" sz="900" dirty="0"/>
+          </a:p>
+        </p:txBody>
+      </p:sp>
+      <p:sp>
+        <p:nvSpPr>
+          <p:cNvPr id="18" name="Box3"/>
+          <p:cNvSpPr/>
+          <p:nvPr/>
+        </p:nvSpPr>
+        <p:spPr>
+          <a:xfrm>
+            <a:off x="2834640" y="1115568"/>
+            <a:ext cx="1188720" cy="1737360"/>
+          </a:xfrm>
+          <a:prstGeom prst="rect">
+            <a:avLst/>
+          </a:prstGeom>
+          <a:solidFill>
+            <a:srgbClr val="FFFFFF"/>
+          </a:solidFill>
+          <a:ln w="12700">
+            <a:solidFill>
+              <a:srgbClr val="1F3A6E"/>
+            </a:solidFill>
+            <a:prstDash val="solid"/>
+          </a:ln>
+        </p:spPr>
+      </p:sp>
+      <p:sp>
+        <p:nvSpPr>
+          <p:cNvPr id="19" name="BoxHead3"/>
+          <p:cNvSpPr/>
+          <p:nvPr/>
+        </p:nvSpPr>
+        <p:spPr>
+          <a:xfrm>
+            <a:off x="2834640" y="1115568"/>
+            <a:ext cx="1188720" cy="274320"/>
+          </a:xfrm>
+          <a:prstGeom prst="rect">
+            <a:avLst/>
+          </a:prstGeom>
+          <a:solidFill>
+            <a:srgbClr val="1F3A6E"/>
+          </a:solidFill>
+          <a:ln w="12700">
+            <a:solidFill>
+              <a:srgbClr val="1F3A6E"/>
+            </a:solidFill>
+            <a:prstDash val="solid"/>
+          </a:ln>
+        </p:spPr>
+      </p:sp>
+      <p:sp>
+        <p:nvSpPr>
+          <p:cNvPr id="20" name="BoxTitle3"/>
+          <p:cNvSpPr txBox="1"/>
+          <p:nvPr/>
+        </p:nvSpPr>
+        <p:spPr>
+          <a:xfrm>
+            <a:off x="2834640" y="1115568"/>
+            <a:ext cx="1188720" cy="274320"/>
+          </a:xfrm>
+          <a:prstGeom prst="rect">
+            <a:avLst/>
+          </a:prstGeom>
+          <a:noFill/>
+          <a:ln/>
+        </p:spPr>
+        <p:txBody>
+          <a:bodyPr wrap="square" lIns="0" tIns="0" rIns="0" bIns="0" rtlCol="0" anchor="ctr"/>
+          <a:lstStyle/>
+          <a:p>
+            <a:pPr algn="ctr" indent="0" marL="0">
+              <a:buNone/>
+            </a:pPr>
+            <a:r>
+              <a:rPr lang="en-US" sz="1000" dirty="0">
+                <a:solidFill>
+                  <a:srgbClr val="FFFFFF"/>
+                </a:solidFill>
+                <a:latin typeface="신세계 민부리 Bold(TTF)" pitchFamily="34" charset="0"/>
+                <a:ea typeface="신세계 민부리 Bold(TTF)" pitchFamily="34" charset="-122"/>
+                <a:cs typeface="신세계 민부리 Bold(TTF)" pitchFamily="34" charset="-120"/>
+              </a:rPr>
+              <a:t>③ 검토 / 심의</a:t>
+            </a:r>
+            <a:endParaRPr lang="en-US" sz="1000" dirty="0"/>
+          </a:p>
+        </p:txBody>
+      </p:sp>
+      <p:sp>
+        <p:nvSpPr>
+          <p:cNvPr id="21" name="BoxBody3"/>
+          <p:cNvSpPr txBox="1"/>
+          <p:nvPr/>
+        </p:nvSpPr>
+        <p:spPr>
+          <a:xfrm>
+            <a:off x="2880360" y="1444752"/>
+            <a:ext cx="1097280" cy="1353312"/>
+          </a:xfrm>
+          <a:prstGeom prst="rect">
+            <a:avLst/>
+          </a:prstGeom>
+          <a:noFill/>
+          <a:ln/>
+        </p:spPr>
+        <p:txBody>
+          <a:bodyPr wrap="square" lIns="0" tIns="0" rIns="0" bIns="0" rtlCol="0" anchor="t"/>
+          <a:lstStyle/>
           <a:p>
             <a:pPr indent="0" marL="0">
               <a:spcAft>
@@ -1511,40 +1623,18 @@
               <a:buNone/>
             </a:pPr>
             <a:r>
-              <a:rPr lang="en-US" sz="950" dirty="0">
+              <a:rPr lang="en-US" sz="850" b="1" dirty="0">
                 <a:solidFill>
                   <a:srgbClr val="262626"/>
                 </a:solidFill>
-                <a:latin typeface="신세계 민부리 Light(TTF)" pitchFamily="34" charset="0"/>
-                <a:ea typeface="신세계 민부리 Light(TTF)" pitchFamily="34" charset="-122"/>
-                <a:cs typeface="신세계 민부리 Light(TTF)" pitchFamily="34" charset="-120"/>
-              </a:rPr>
-              <a:t>      → 광고사업 불가를 근거로 300억 제시 / 민투법 적용 기준 협의 (투자비 · 공공성 등)</a:t>
-            </a:r>
-            <a:endParaRPr lang="en-US" sz="950" dirty="0"/>
-          </a:p>
-        </p:txBody>
-      </p:sp>
-      <p:sp>
-        <p:nvSpPr>
-          <p:cNvPr id="18" name="Item2"/>
-          <p:cNvSpPr txBox="1"/>
-          <p:nvPr/>
-        </p:nvSpPr>
-        <p:spPr>
-          <a:xfrm>
-            <a:off x="274320" y="1965960"/>
-            <a:ext cx="6309360" cy="420624"/>
-          </a:xfrm>
-          <a:prstGeom prst="rect">
-            <a:avLst/>
-          </a:prstGeom>
-          <a:noFill/>
-          <a:ln/>
-        </p:spPr>
-        <p:txBody>
-          <a:bodyPr wrap="square" lIns="0" tIns="0" rIns="0" bIns="0" rtlCol="0" anchor="t"/>
-          <a:lstStyle/>
+                <a:latin typeface="신세계 민부리 Bold(TTF)" pitchFamily="34" charset="0"/>
+                <a:ea typeface="신세계 민부리 Bold(TTF)" pitchFamily="34" charset="-122"/>
+                <a:cs typeface="신세계 민부리 Bold(TTF)" pitchFamily="34" charset="-120"/>
+              </a:rPr>
+              <a:t>· 적격성 검토</a:t>
+            </a:r>
+            <a:endParaRPr lang="en-US" sz="850" dirty="0"/>
+          </a:p>
           <a:p>
             <a:pPr indent="0" marL="0">
               <a:spcAft>
@@ -1553,16 +1643,19 @@
               <a:buNone/>
             </a:pPr>
             <a:r>
-              <a:rPr lang="en-US" sz="950" b="1" dirty="0">
-                <a:solidFill>
-                  <a:srgbClr val="1F3A6E"/>
+              <a:rPr lang="en-US" sz="850" b="1" dirty="0">
+                <a:solidFill>
+                  <a:srgbClr val="262626"/>
                 </a:solidFill>
                 <a:latin typeface="신세계 민부리 Bold(TTF)" pitchFamily="34" charset="0"/>
                 <a:ea typeface="신세계 민부리 Bold(TTF)" pitchFamily="34" charset="-122"/>
                 <a:cs typeface="신세계 민부리 Bold(TTF)" pitchFamily="34" charset="-120"/>
               </a:rPr>
-              <a:t>② 민간 제안 </a:t>
-            </a:r>
+              <a:t>· 민투심 · 市의회 동의</a:t>
+            </a:r>
+            <a:endParaRPr lang="en-US" sz="850" dirty="0"/>
+          </a:p>
+          <a:p>
             <a:pPr indent="0" marL="0">
               <a:spcAft>
                 <a:spcPts val="200"/>
@@ -1570,16 +1663,16 @@
               <a:buNone/>
             </a:pPr>
             <a:r>
-              <a:rPr lang="en-US" sz="950" dirty="0">
-                <a:solidFill>
-                  <a:srgbClr val="595959"/>
-                </a:solidFill>
-                <a:latin typeface="신세계 민부리 Light(TTF)" pitchFamily="34" charset="0"/>
-                <a:ea typeface="신세계 민부리 Light(TTF)" pitchFamily="34" charset="-122"/>
-                <a:cs typeface="신세계 민부리 Light(TTF)" pitchFamily="34" charset="-120"/>
-              </a:rPr>
-              <a:t>(’27.1Q)  </a:t>
-            </a:r>
+              <a:rPr lang="en-US" sz="400" dirty="0">
+                <a:solidFill>
+                  <a:srgbClr val="000000"/>
+                </a:solidFill>
+              </a:rPr>
+              <a:t> </a:t>
+            </a:r>
+            <a:endParaRPr lang="en-US" sz="850" dirty="0"/>
+          </a:p>
+          <a:p>
             <a:pPr indent="0" marL="0">
               <a:spcAft>
                 <a:spcPts val="200"/>
@@ -1587,18 +1680,193 @@
               <a:buNone/>
             </a:pPr>
             <a:r>
-              <a:rPr lang="en-US" sz="950" b="1" dirty="0">
+              <a:rPr lang="en-US" sz="850" dirty="0">
                 <a:solidFill>
                   <a:srgbClr val="262626"/>
+                </a:solidFill>
+                <a:latin typeface="신세계 민부리 Light(TTF)" pitchFamily="34" charset="0"/>
+                <a:ea typeface="신세계 민부리 Light(TTF)" pitchFamily="34" charset="-122"/>
+                <a:cs typeface="신세계 민부리 Light(TTF)" pitchFamily="34" charset="-120"/>
+              </a:rPr>
+              <a:t>→ 해지시지급금 총사업비 인정 + 공공성 설명 → 30년 + α 확보</a:t>
+            </a:r>
+            <a:endParaRPr lang="en-US" sz="850" dirty="0"/>
+          </a:p>
+        </p:txBody>
+      </p:sp>
+      <p:sp>
+        <p:nvSpPr>
+          <p:cNvPr id="22" name="Dot4"/>
+          <p:cNvSpPr/>
+          <p:nvPr/>
+        </p:nvSpPr>
+        <p:spPr>
+          <a:xfrm>
+            <a:off x="4640580" y="845820"/>
+            <a:ext cx="137160" cy="137160"/>
+          </a:xfrm>
+          <a:prstGeom prst="ellipse">
+            <a:avLst/>
+          </a:prstGeom>
+          <a:solidFill>
+            <a:srgbClr val="FFFFFF"/>
+          </a:solidFill>
+          <a:ln w="25400">
+            <a:solidFill>
+              <a:srgbClr val="1F3A6E"/>
+            </a:solidFill>
+            <a:prstDash val="solid"/>
+          </a:ln>
+        </p:spPr>
+      </p:sp>
+      <p:sp>
+        <p:nvSpPr>
+          <p:cNvPr id="23" name="Date4"/>
+          <p:cNvSpPr txBox="1"/>
+          <p:nvPr/>
+        </p:nvSpPr>
+        <p:spPr>
+          <a:xfrm>
+            <a:off x="4114800" y="603504"/>
+            <a:ext cx="1188720" cy="201168"/>
+          </a:xfrm>
+          <a:prstGeom prst="rect">
+            <a:avLst/>
+          </a:prstGeom>
+          <a:noFill/>
+          <a:ln/>
+        </p:spPr>
+        <p:txBody>
+          <a:bodyPr wrap="square" lIns="0" tIns="0" rIns="0" bIns="0" rtlCol="0" anchor="ctr"/>
+          <a:lstStyle/>
+          <a:p>
+            <a:pPr algn="ctr" indent="0" marL="0">
+              <a:buNone/>
+            </a:pPr>
+            <a:r>
+              <a:rPr lang="en-US" sz="900" dirty="0">
+                <a:solidFill>
+                  <a:srgbClr val="1F3A6E"/>
                 </a:solidFill>
                 <a:latin typeface="신세계 민부리 Bold(TTF)" pitchFamily="34" charset="0"/>
                 <a:ea typeface="신세계 민부리 Bold(TTF)" pitchFamily="34" charset="-122"/>
                 <a:cs typeface="신세계 민부리 Bold(TTF)" pitchFamily="34" charset="-120"/>
               </a:rPr>
-              <a:t>통합사업 제안서 제출</a:t>
-            </a:r>
-            <a:endParaRPr lang="en-US" sz="950" dirty="0"/>
-          </a:p>
+              <a:t>’28.1Q ~ 3Q</a:t>
+            </a:r>
+            <a:endParaRPr lang="en-US" sz="900" dirty="0"/>
+          </a:p>
+        </p:txBody>
+      </p:sp>
+      <p:sp>
+        <p:nvSpPr>
+          <p:cNvPr id="24" name="Box4"/>
+          <p:cNvSpPr/>
+          <p:nvPr/>
+        </p:nvSpPr>
+        <p:spPr>
+          <a:xfrm>
+            <a:off x="4114800" y="1115568"/>
+            <a:ext cx="1188720" cy="1737360"/>
+          </a:xfrm>
+          <a:prstGeom prst="rect">
+            <a:avLst/>
+          </a:prstGeom>
+          <a:solidFill>
+            <a:srgbClr val="FFFFFF"/>
+          </a:solidFill>
+          <a:ln w="12700">
+            <a:solidFill>
+              <a:srgbClr val="1F3A6E"/>
+            </a:solidFill>
+            <a:prstDash val="solid"/>
+          </a:ln>
+        </p:spPr>
+      </p:sp>
+      <p:sp>
+        <p:nvSpPr>
+          <p:cNvPr id="25" name="BoxHead4"/>
+          <p:cNvSpPr/>
+          <p:nvPr/>
+        </p:nvSpPr>
+        <p:spPr>
+          <a:xfrm>
+            <a:off x="4114800" y="1115568"/>
+            <a:ext cx="1188720" cy="274320"/>
+          </a:xfrm>
+          <a:prstGeom prst="rect">
+            <a:avLst/>
+          </a:prstGeom>
+          <a:solidFill>
+            <a:srgbClr val="1F3A6E"/>
+          </a:solidFill>
+          <a:ln w="12700">
+            <a:solidFill>
+              <a:srgbClr val="1F3A6E"/>
+            </a:solidFill>
+            <a:prstDash val="solid"/>
+          </a:ln>
+        </p:spPr>
+      </p:sp>
+      <p:sp>
+        <p:nvSpPr>
+          <p:cNvPr id="26" name="BoxTitle4"/>
+          <p:cNvSpPr txBox="1"/>
+          <p:nvPr/>
+        </p:nvSpPr>
+        <p:spPr>
+          <a:xfrm>
+            <a:off x="4114800" y="1115568"/>
+            <a:ext cx="1188720" cy="274320"/>
+          </a:xfrm>
+          <a:prstGeom prst="rect">
+            <a:avLst/>
+          </a:prstGeom>
+          <a:noFill/>
+          <a:ln/>
+        </p:spPr>
+        <p:txBody>
+          <a:bodyPr wrap="square" lIns="0" tIns="0" rIns="0" bIns="0" rtlCol="0" anchor="ctr"/>
+          <a:lstStyle/>
+          <a:p>
+            <a:pPr algn="ctr" indent="0" marL="0">
+              <a:buNone/>
+            </a:pPr>
+            <a:r>
+              <a:rPr lang="en-US" sz="1000" dirty="0">
+                <a:solidFill>
+                  <a:srgbClr val="FFFFFF"/>
+                </a:solidFill>
+                <a:latin typeface="신세계 민부리 Bold(TTF)" pitchFamily="34" charset="0"/>
+                <a:ea typeface="신세계 민부리 Bold(TTF)" pitchFamily="34" charset="-122"/>
+                <a:cs typeface="신세계 민부리 Bold(TTF)" pitchFamily="34" charset="-120"/>
+              </a:rPr>
+              <a:t>④ 공고 / 협약</a:t>
+            </a:r>
+            <a:endParaRPr lang="en-US" sz="1000" dirty="0"/>
+          </a:p>
+        </p:txBody>
+      </p:sp>
+      <p:sp>
+        <p:nvSpPr>
+          <p:cNvPr id="27" name="BoxBody4"/>
+          <p:cNvSpPr txBox="1"/>
+          <p:nvPr/>
+        </p:nvSpPr>
+        <p:spPr>
+          <a:xfrm>
+            <a:off x="4160520" y="1444752"/>
+            <a:ext cx="1097280" cy="1353312"/>
+          </a:xfrm>
+          <a:prstGeom prst="rect">
+            <a:avLst/>
+          </a:prstGeom>
+          <a:noFill/>
+          <a:ln/>
+        </p:spPr>
+        <p:txBody>
+          <a:bodyPr wrap="square" lIns="0" tIns="0" rIns="0" bIns="0" rtlCol="0" anchor="t"/>
+          <a:lstStyle/>
           <a:p>
             <a:pPr indent="0" marL="0">
               <a:spcAft>
@@ -1607,40 +1875,18 @@
               <a:buNone/>
             </a:pPr>
             <a:r>
-              <a:rPr lang="en-US" sz="950" dirty="0">
+              <a:rPr lang="en-US" sz="850" b="1" dirty="0">
                 <a:solidFill>
                   <a:srgbClr val="262626"/>
                 </a:solidFill>
-                <a:latin typeface="신세계 민부리 Light(TTF)" pitchFamily="34" charset="0"/>
-                <a:ea typeface="신세계 민부리 Light(TTF)" pitchFamily="34" charset="-122"/>
-                <a:cs typeface="신세계 민부리 Light(TTF)" pitchFamily="34" charset="-120"/>
-              </a:rPr>
-              <a:t>      → 기본설계 · 공공성 방안 · 통합운영 방안 포함</a:t>
-            </a:r>
-            <a:endParaRPr lang="en-US" sz="950" dirty="0"/>
-          </a:p>
-        </p:txBody>
-      </p:sp>
-      <p:sp>
-        <p:nvSpPr>
-          <p:cNvPr id="19" name="Item3"/>
-          <p:cNvSpPr txBox="1"/>
-          <p:nvPr/>
-        </p:nvSpPr>
-        <p:spPr>
-          <a:xfrm>
-            <a:off x="274320" y="2423160"/>
-            <a:ext cx="6309360" cy="420624"/>
-          </a:xfrm>
-          <a:prstGeom prst="rect">
-            <a:avLst/>
-          </a:prstGeom>
-          <a:noFill/>
-          <a:ln/>
-        </p:spPr>
-        <p:txBody>
-          <a:bodyPr wrap="square" lIns="0" tIns="0" rIns="0" bIns="0" rtlCol="0" anchor="t"/>
-          <a:lstStyle/>
+                <a:latin typeface="신세계 민부리 Bold(TTF)" pitchFamily="34" charset="0"/>
+                <a:ea typeface="신세계 민부리 Bold(TTF)" pitchFamily="34" charset="-122"/>
+                <a:cs typeface="신세계 민부리 Bold(TTF)" pitchFamily="34" charset="-120"/>
+              </a:rPr>
+              <a:t>· 제3자 제안공고</a:t>
+            </a:r>
+            <a:endParaRPr lang="en-US" sz="850" dirty="0"/>
+          </a:p>
           <a:p>
             <a:pPr indent="0" marL="0">
               <a:spcAft>
@@ -1649,16 +1895,19 @@
               <a:buNone/>
             </a:pPr>
             <a:r>
-              <a:rPr lang="en-US" sz="950" b="1" dirty="0">
-                <a:solidFill>
-                  <a:srgbClr val="1F3A6E"/>
+              <a:rPr lang="en-US" sz="850" b="1" dirty="0">
+                <a:solidFill>
+                  <a:srgbClr val="262626"/>
                 </a:solidFill>
                 <a:latin typeface="신세계 민부리 Bold(TTF)" pitchFamily="34" charset="0"/>
                 <a:ea typeface="신세계 민부리 Bold(TTF)" pitchFamily="34" charset="-122"/>
                 <a:cs typeface="신세계 민부리 Bold(TTF)" pitchFamily="34" charset="-120"/>
               </a:rPr>
-              <a:t>③ 검토 / 심의 </a:t>
-            </a:r>
+              <a:t>· 우선협상 → 실시협약</a:t>
+            </a:r>
+            <a:endParaRPr lang="en-US" sz="850" dirty="0"/>
+          </a:p>
+          <a:p>
             <a:pPr indent="0" marL="0">
               <a:spcAft>
                 <a:spcPts val="200"/>
@@ -1666,16 +1915,16 @@
               <a:buNone/>
             </a:pPr>
             <a:r>
-              <a:rPr lang="en-US" sz="950" dirty="0">
-                <a:solidFill>
-                  <a:srgbClr val="595959"/>
-                </a:solidFill>
-                <a:latin typeface="신세계 민부리 Light(TTF)" pitchFamily="34" charset="0"/>
-                <a:ea typeface="신세계 민부리 Light(TTF)" pitchFamily="34" charset="-122"/>
-                <a:cs typeface="신세계 민부리 Light(TTF)" pitchFamily="34" charset="-120"/>
-              </a:rPr>
-              <a:t>(’27.2Q ~ 4Q)  </a:t>
-            </a:r>
+              <a:rPr lang="en-US" sz="400" dirty="0">
+                <a:solidFill>
+                  <a:srgbClr val="000000"/>
+                </a:solidFill>
+              </a:rPr>
+              <a:t> </a:t>
+            </a:r>
+            <a:endParaRPr lang="en-US" sz="850" dirty="0"/>
+          </a:p>
+          <a:p>
             <a:pPr indent="0" marL="0">
               <a:spcAft>
                 <a:spcPts val="200"/>
@@ -1683,17 +1932,17 @@
               <a:buNone/>
             </a:pPr>
             <a:r>
-              <a:rPr lang="en-US" sz="950" b="1" dirty="0">
+              <a:rPr lang="en-US" sz="850" dirty="0">
                 <a:solidFill>
                   <a:srgbClr val="262626"/>
                 </a:solidFill>
-                <a:latin typeface="신세계 민부리 Bold(TTF)" pitchFamily="34" charset="0"/>
-                <a:ea typeface="신세계 민부리 Bold(TTF)" pitchFamily="34" charset="-122"/>
-                <a:cs typeface="신세계 민부리 Bold(TTF)" pitchFamily="34" charset="-120"/>
-              </a:rPr>
-              <a:t>적격성 검토 → 민투심 · 市의회 동의</a:t>
-            </a:r>
-            <a:endParaRPr lang="en-US" sz="950" dirty="0"/>
+                <a:latin typeface="신세계 민부리 Light(TTF)" pitchFamily="34" charset="0"/>
+                <a:ea typeface="신세계 민부리 Light(TTF)" pitchFamily="34" charset="-122"/>
+                <a:cs typeface="신세계 민부리 Light(TTF)" pitchFamily="34" charset="-120"/>
+              </a:rPr>
+              <a:t>→ 세빛섬 연계 / MD 역량으로 경쟁 우위</a:t>
+            </a:r>
+            <a:endParaRPr lang="en-US" sz="850" dirty="0"/>
           </a:p>
           <a:p>
             <a:pPr indent="0" marL="0">
@@ -1703,7 +1952,7 @@
               <a:buNone/>
             </a:pPr>
             <a:r>
-              <a:rPr lang="en-US" sz="950" dirty="0">
+              <a:rPr lang="en-US" sz="850" dirty="0">
                 <a:solidFill>
                   <a:srgbClr val="262626"/>
                 </a:solidFill>
@@ -1711,22 +1960,175 @@
                 <a:ea typeface="신세계 민부리 Light(TTF)" pitchFamily="34" charset="-122"/>
                 <a:cs typeface="신세계 민부리 Light(TTF)" pitchFamily="34" charset="-120"/>
               </a:rPr>
-              <a:t>      → 해지시지급금의 총사업비 인정 + 공공성 설명으로 운영기간 30년 + α 확보</a:t>
-            </a:r>
-            <a:endParaRPr lang="en-US" sz="950" dirty="0"/>
+              <a:t>→ 市 협상조건 / 사업계획 확정</a:t>
+            </a:r>
+            <a:endParaRPr lang="en-US" sz="850" dirty="0"/>
           </a:p>
         </p:txBody>
       </p:sp>
       <p:sp>
         <p:nvSpPr>
-          <p:cNvPr id="20" name="Item4"/>
+          <p:cNvPr id="28" name="Dot5"/>
+          <p:cNvSpPr/>
+          <p:nvPr/>
+        </p:nvSpPr>
+        <p:spPr>
+          <a:xfrm>
+            <a:off x="5920740" y="845820"/>
+            <a:ext cx="137160" cy="137160"/>
+          </a:xfrm>
+          <a:prstGeom prst="ellipse">
+            <a:avLst/>
+          </a:prstGeom>
+          <a:solidFill>
+            <a:srgbClr val="FFFFFF"/>
+          </a:solidFill>
+          <a:ln w="25400">
+            <a:solidFill>
+              <a:srgbClr val="1F3A6E"/>
+            </a:solidFill>
+            <a:prstDash val="solid"/>
+          </a:ln>
+        </p:spPr>
+      </p:sp>
+      <p:sp>
+        <p:nvSpPr>
+          <p:cNvPr id="29" name="Date5"/>
           <p:cNvSpPr txBox="1"/>
           <p:nvPr/>
         </p:nvSpPr>
         <p:spPr>
           <a:xfrm>
-            <a:off x="274320" y="2880360"/>
-            <a:ext cx="6309360" cy="420624"/>
+            <a:off x="5394960" y="603504"/>
+            <a:ext cx="1188720" cy="201168"/>
+          </a:xfrm>
+          <a:prstGeom prst="rect">
+            <a:avLst/>
+          </a:prstGeom>
+          <a:noFill/>
+          <a:ln/>
+        </p:spPr>
+        <p:txBody>
+          <a:bodyPr wrap="square" lIns="0" tIns="0" rIns="0" bIns="0" rtlCol="0" anchor="ctr"/>
+          <a:lstStyle/>
+          <a:p>
+            <a:pPr algn="ctr" indent="0" marL="0">
+              <a:buNone/>
+            </a:pPr>
+            <a:r>
+              <a:rPr lang="en-US" sz="900" dirty="0">
+                <a:solidFill>
+                  <a:srgbClr val="1F3A6E"/>
+                </a:solidFill>
+                <a:latin typeface="신세계 민부리 Bold(TTF)" pitchFamily="34" charset="0"/>
+                <a:ea typeface="신세계 민부리 Bold(TTF)" pitchFamily="34" charset="-122"/>
+                <a:cs typeface="신세계 민부리 Bold(TTF)" pitchFamily="34" charset="-120"/>
+              </a:rPr>
+              <a:t>’28.下 ~ ’29.初</a:t>
+            </a:r>
+            <a:endParaRPr lang="en-US" sz="900" dirty="0"/>
+          </a:p>
+        </p:txBody>
+      </p:sp>
+      <p:sp>
+        <p:nvSpPr>
+          <p:cNvPr id="30" name="Box5"/>
+          <p:cNvSpPr/>
+          <p:nvPr/>
+        </p:nvSpPr>
+        <p:spPr>
+          <a:xfrm>
+            <a:off x="5394960" y="1115568"/>
+            <a:ext cx="1188720" cy="1737360"/>
+          </a:xfrm>
+          <a:prstGeom prst="rect">
+            <a:avLst/>
+          </a:prstGeom>
+          <a:solidFill>
+            <a:srgbClr val="FFFFFF"/>
+          </a:solidFill>
+          <a:ln w="12700">
+            <a:solidFill>
+              <a:srgbClr val="1F3A6E"/>
+            </a:solidFill>
+            <a:prstDash val="solid"/>
+          </a:ln>
+        </p:spPr>
+      </p:sp>
+      <p:sp>
+        <p:nvSpPr>
+          <p:cNvPr id="31" name="BoxHead5"/>
+          <p:cNvSpPr/>
+          <p:nvPr/>
+        </p:nvSpPr>
+        <p:spPr>
+          <a:xfrm>
+            <a:off x="5394960" y="1115568"/>
+            <a:ext cx="1188720" cy="274320"/>
+          </a:xfrm>
+          <a:prstGeom prst="rect">
+            <a:avLst/>
+          </a:prstGeom>
+          <a:solidFill>
+            <a:srgbClr val="1F3A6E"/>
+          </a:solidFill>
+          <a:ln w="12700">
+            <a:solidFill>
+              <a:srgbClr val="1F3A6E"/>
+            </a:solidFill>
+            <a:prstDash val="solid"/>
+          </a:ln>
+        </p:spPr>
+      </p:sp>
+      <p:sp>
+        <p:nvSpPr>
+          <p:cNvPr id="32" name="BoxTitle5"/>
+          <p:cNvSpPr txBox="1"/>
+          <p:nvPr/>
+        </p:nvSpPr>
+        <p:spPr>
+          <a:xfrm>
+            <a:off x="5394960" y="1115568"/>
+            <a:ext cx="1188720" cy="274320"/>
+          </a:xfrm>
+          <a:prstGeom prst="rect">
+            <a:avLst/>
+          </a:prstGeom>
+          <a:noFill/>
+          <a:ln/>
+        </p:spPr>
+        <p:txBody>
+          <a:bodyPr wrap="square" lIns="0" tIns="0" rIns="0" bIns="0" rtlCol="0" anchor="ctr"/>
+          <a:lstStyle/>
+          <a:p>
+            <a:pPr algn="ctr" indent="0" marL="0">
+              <a:buNone/>
+            </a:pPr>
+            <a:r>
+              <a:rPr lang="en-US" sz="1000" dirty="0">
+                <a:solidFill>
+                  <a:srgbClr val="FFFFFF"/>
+                </a:solidFill>
+                <a:latin typeface="신세계 민부리 Bold(TTF)" pitchFamily="34" charset="0"/>
+                <a:ea typeface="신세계 민부리 Bold(TTF)" pitchFamily="34" charset="-122"/>
+                <a:cs typeface="신세계 민부리 Bold(TTF)" pitchFamily="34" charset="-120"/>
+              </a:rPr>
+              <a:t>⑤ 착공 / 개장</a:t>
+            </a:r>
+            <a:endParaRPr lang="en-US" sz="1000" dirty="0"/>
+          </a:p>
+        </p:txBody>
+      </p:sp>
+      <p:sp>
+        <p:nvSpPr>
+          <p:cNvPr id="33" name="BoxBody5"/>
+          <p:cNvSpPr txBox="1"/>
+          <p:nvPr/>
+        </p:nvSpPr>
+        <p:spPr>
+          <a:xfrm>
+            <a:off x="5440680" y="1444752"/>
+            <a:ext cx="1097280" cy="1353312"/>
           </a:xfrm>
           <a:prstGeom prst="rect">
             <a:avLst/>
@@ -1745,16 +2147,19 @@
               <a:buNone/>
             </a:pPr>
             <a:r>
-              <a:rPr lang="en-US" sz="950" b="1" dirty="0">
-                <a:solidFill>
-                  <a:srgbClr val="1F3A6E"/>
+              <a:rPr lang="en-US" sz="850" b="1" dirty="0">
+                <a:solidFill>
+                  <a:srgbClr val="262626"/>
                 </a:solidFill>
                 <a:latin typeface="신세계 민부리 Bold(TTF)" pitchFamily="34" charset="0"/>
                 <a:ea typeface="신세계 민부리 Bold(TTF)" pitchFamily="34" charset="-122"/>
                 <a:cs typeface="신세계 민부리 Bold(TTF)" pitchFamily="34" charset="-120"/>
               </a:rPr>
-              <a:t>④ 공고 / 협약 </a:t>
-            </a:r>
+              <a:t>· 세빛섬 리모델링 착공</a:t>
+            </a:r>
+            <a:endParaRPr lang="en-US" sz="850" dirty="0"/>
+          </a:p>
+          <a:p>
             <a:pPr indent="0" marL="0">
               <a:spcAft>
                 <a:spcPts val="200"/>
@@ -1762,16 +2167,19 @@
               <a:buNone/>
             </a:pPr>
             <a:r>
-              <a:rPr lang="en-US" sz="950" dirty="0">
-                <a:solidFill>
-                  <a:srgbClr val="595959"/>
-                </a:solidFill>
-                <a:latin typeface="신세계 민부리 Light(TTF)" pitchFamily="34" charset="0"/>
-                <a:ea typeface="신세계 민부리 Light(TTF)" pitchFamily="34" charset="-122"/>
-                <a:cs typeface="신세계 민부리 Light(TTF)" pitchFamily="34" charset="-120"/>
-              </a:rPr>
-              <a:t>(’28.1Q ~ 3Q)  </a:t>
-            </a:r>
+              <a:rPr lang="en-US" sz="850" b="1" dirty="0">
+                <a:solidFill>
+                  <a:srgbClr val="262626"/>
+                </a:solidFill>
+                <a:latin typeface="신세계 민부리 Bold(TTF)" pitchFamily="34" charset="0"/>
+                <a:ea typeface="신세계 민부리 Bold(TTF)" pitchFamily="34" charset="-122"/>
+                <a:cs typeface="신세계 민부리 Bold(TTF)" pitchFamily="34" charset="-120"/>
+              </a:rPr>
+              <a:t>· 세빛섬 / 푸드존 준공</a:t>
+            </a:r>
+            <a:endParaRPr lang="en-US" sz="850" dirty="0"/>
+          </a:p>
+          <a:p>
             <a:pPr indent="0" marL="0">
               <a:spcAft>
                 <a:spcPts val="200"/>
@@ -1779,17 +2187,14 @@
               <a:buNone/>
             </a:pPr>
             <a:r>
-              <a:rPr lang="en-US" sz="950" b="1" dirty="0">
-                <a:solidFill>
-                  <a:srgbClr val="262626"/>
-                </a:solidFill>
-                <a:latin typeface="신세계 민부리 Bold(TTF)" pitchFamily="34" charset="0"/>
-                <a:ea typeface="신세계 민부리 Bold(TTF)" pitchFamily="34" charset="-122"/>
-                <a:cs typeface="신세계 민부리 Bold(TTF)" pitchFamily="34" charset="-120"/>
-              </a:rPr>
-              <a:t>제3자 제안공고 → 우선협상 → 실시협약</a:t>
-            </a:r>
-            <a:endParaRPr lang="en-US" sz="950" dirty="0"/>
+              <a:rPr lang="en-US" sz="400" dirty="0">
+                <a:solidFill>
+                  <a:srgbClr val="000000"/>
+                </a:solidFill>
+              </a:rPr>
+              <a:t> </a:t>
+            </a:r>
+            <a:endParaRPr lang="en-US" sz="850" dirty="0"/>
           </a:p>
           <a:p>
             <a:pPr indent="0" marL="0">
@@ -1799,7 +2204,7 @@
               <a:buNone/>
             </a:pPr>
             <a:r>
-              <a:rPr lang="en-US" sz="950" dirty="0">
+              <a:rPr lang="en-US" sz="850" dirty="0">
                 <a:solidFill>
                   <a:srgbClr val="262626"/>
                 </a:solidFill>
@@ -1807,105 +2212,9 @@
                 <a:ea typeface="신세계 민부리 Light(TTF)" pitchFamily="34" charset="-122"/>
                 <a:cs typeface="신세계 민부리 Light(TTF)" pitchFamily="34" charset="-120"/>
               </a:rPr>
-              <a:t>      → 세빛섬 연계 · MD 역량으로 경쟁 우위 / 市 협상조건 · 사업계획 확정</a:t>
-            </a:r>
-            <a:endParaRPr lang="en-US" sz="950" dirty="0"/>
-          </a:p>
-        </p:txBody>
-      </p:sp>
-      <p:sp>
-        <p:nvSpPr>
-          <p:cNvPr id="21" name="Item5"/>
-          <p:cNvSpPr txBox="1"/>
-          <p:nvPr/>
-        </p:nvSpPr>
-        <p:spPr>
-          <a:xfrm>
-            <a:off x="274320" y="3337560"/>
-            <a:ext cx="6309360" cy="420624"/>
-          </a:xfrm>
-          <a:prstGeom prst="rect">
-            <a:avLst/>
-          </a:prstGeom>
-          <a:noFill/>
-          <a:ln/>
-        </p:spPr>
-        <p:txBody>
-          <a:bodyPr wrap="square" lIns="0" tIns="0" rIns="0" bIns="0" rtlCol="0" anchor="t"/>
-          <a:lstStyle/>
-          <a:p>
-            <a:pPr indent="0" marL="0">
-              <a:spcAft>
-                <a:spcPts val="200"/>
-              </a:spcAft>
-              <a:buNone/>
-            </a:pPr>
-            <a:r>
-              <a:rPr lang="en-US" sz="950" b="1" dirty="0">
-                <a:solidFill>
-                  <a:srgbClr val="1F3A6E"/>
-                </a:solidFill>
-                <a:latin typeface="신세계 민부리 Bold(TTF)" pitchFamily="34" charset="0"/>
-                <a:ea typeface="신세계 민부리 Bold(TTF)" pitchFamily="34" charset="-122"/>
-                <a:cs typeface="신세계 민부리 Bold(TTF)" pitchFamily="34" charset="-120"/>
-              </a:rPr>
-              <a:t>⑤ 착공 / 개장 </a:t>
-            </a:r>
-            <a:pPr indent="0" marL="0">
-              <a:spcAft>
-                <a:spcPts val="200"/>
-              </a:spcAft>
-              <a:buNone/>
-            </a:pPr>
-            <a:r>
-              <a:rPr lang="en-US" sz="950" dirty="0">
-                <a:solidFill>
-                  <a:srgbClr val="595959"/>
-                </a:solidFill>
-                <a:latin typeface="신세계 민부리 Light(TTF)" pitchFamily="34" charset="0"/>
-                <a:ea typeface="신세계 민부리 Light(TTF)" pitchFamily="34" charset="-122"/>
-                <a:cs typeface="신세계 민부리 Light(TTF)" pitchFamily="34" charset="-120"/>
-              </a:rPr>
-              <a:t>(’28.下 ~ ’29.初)  </a:t>
-            </a:r>
-            <a:pPr indent="0" marL="0">
-              <a:spcAft>
-                <a:spcPts val="200"/>
-              </a:spcAft>
-              <a:buNone/>
-            </a:pPr>
-            <a:r>
-              <a:rPr lang="en-US" sz="950" b="1" dirty="0">
-                <a:solidFill>
-                  <a:srgbClr val="262626"/>
-                </a:solidFill>
-                <a:latin typeface="신세계 민부리 Bold(TTF)" pitchFamily="34" charset="0"/>
-                <a:ea typeface="신세계 민부리 Bold(TTF)" pitchFamily="34" charset="-122"/>
-                <a:cs typeface="신세계 민부리 Bold(TTF)" pitchFamily="34" charset="-120"/>
-              </a:rPr>
-              <a:t>세빛섬 리모델링 착공 · 세빛섬 / 푸드존 준공</a:t>
-            </a:r>
-            <a:endParaRPr lang="en-US" sz="950" dirty="0"/>
-          </a:p>
-          <a:p>
-            <a:pPr indent="0" marL="0">
-              <a:spcAft>
-                <a:spcPts val="200"/>
-              </a:spcAft>
-              <a:buNone/>
-            </a:pPr>
-            <a:r>
-              <a:rPr lang="en-US" sz="950" dirty="0">
-                <a:solidFill>
-                  <a:srgbClr val="262626"/>
-                </a:solidFill>
-                <a:latin typeface="신세계 민부리 Light(TTF)" pitchFamily="34" charset="0"/>
-                <a:ea typeface="신세계 민부리 Light(TTF)" pitchFamily="34" charset="-122"/>
-                <a:cs typeface="신세계 민부리 Light(TTF)" pitchFamily="34" charset="-120"/>
-              </a:rPr>
-              <a:t>      → 百 협업 테넌트 유치 / 통합 그랜드 오픈</a:t>
-            </a:r>
-            <a:endParaRPr lang="en-US" sz="950" dirty="0"/>
+              <a:t>→ 百 협업 테넌트 유치 / 통합 그랜드 오픈</a:t>
+            </a:r>
+            <a:endParaRPr lang="en-US" sz="850" dirty="0"/>
           </a:p>
         </p:txBody>
       </p:sp>
